--- a/examples/09_robotics_series_a/Presentation.pptx
+++ b/examples/09_robotics_series_a/Presentation.pptx
@@ -7,10 +7,9 @@
   <p:sldIdLst>
     <p:sldId id="256" r:id="rId2"/>
     <p:sldId id="257" r:id="rId3"/>
-    <p:sldId id="258" r:id="rId4"/>
   </p:sldIdLst>
   <p:notesMasterIdLst>
-    <p:notesMasterId r:id="rId5"/>
+    <p:notesMasterId r:id="rId4"/>
   </p:notesMasterIdLst>
   <p:sldSz cx="12192000" cy="6858000"/>
   <p:notesSz cx="6858000" cy="12192000"/>
@@ -504,8 +503,8 @@
           <a:p>
             <a:r>
               <a:rPr lang="en-US" dirty="0"/>
-              <a:t>1. Hero
-note: [오프닝] 1,000대 군집 로봇을 실시간 관제하는 시리즈 A 투자 피치를 발표합니다.</a:t>
+              <a:t>Slide 1: Giant Bold Impact Cover
+note: 시리즈 A 피치덱의 강렬한 매출 트랙션과 420% 성장률 지표입니다.</a:t>
             </a:r>
             <a:endParaRPr lang="en-US" dirty="0"/>
           </a:p>
@@ -593,8 +592,7 @@
           <a:p>
             <a:r>
               <a:rPr lang="en-US" dirty="0"/>
-              <a:t>2. Big Stats
-note: [트랙션] 연매출 8.4M 달러와 420% 성장률로 시장을 선점하고 있습니다.</a:t>
+              <a:t>Slide 2: Bold Problem vs Solution</a:t>
             </a:r>
             <a:endParaRPr lang="en-US" dirty="0"/>
           </a:p>
@@ -618,95 +616,6 @@
             <a:fld id="{F7021451-1387-4CA6-816F-3879F97B5CBC}" type="slidenum">
               <a:rPr lang="en-US"/>
               <a:t>2</a:t>
-            </a:fld>
-            <a:endParaRPr lang="en-US"/>
-          </a:p>
-        </p:txBody>
-      </p:sp>
-    </p:spTree>
-    <p:extLst>
-      <p:ext uri="{BB962C8B-B14F-4D97-AF65-F5344CB8AC3E}">
-        <p14:creationId xmlns:p14="http://schemas.microsoft.com/office/powerpoint/2010/main" val="1024086991"/>
-      </p:ext>
-    </p:extLst>
-  </p:cSld>
-  <p:clrMapOvr>
-    <a:masterClrMapping/>
-  </p:clrMapOvr>
-</p:notes>
-</file>
-
-<file path=ppt/notesSlides/notesSlide3.xml><?xml version="1.0" encoding="utf-8"?>
-<p:notes xmlns:a="http://schemas.openxmlformats.org/drawingml/2006/main" xmlns:r="http://schemas.openxmlformats.org/officeDocument/2006/relationships" xmlns:p="http://schemas.openxmlformats.org/presentationml/2006/main">
-  <p:cSld>
-    <p:spTree>
-      <p:nvGrpSpPr>
-        <p:cNvPr id="1" name=""/>
-        <p:cNvGrpSpPr/>
-        <p:nvPr/>
-      </p:nvGrpSpPr>
-      <p:grpSpPr>
-        <a:xfrm>
-          <a:off x="0" y="0"/>
-          <a:ext cx="0" cy="0"/>
-          <a:chOff x="0" y="0"/>
-          <a:chExt cx="0" cy="0"/>
-        </a:xfrm>
-      </p:grpSpPr>
-      <p:sp>
-        <p:nvSpPr>
-          <p:cNvPr id="2" name="Slide Image Placeholder 1"/>
-          <p:cNvSpPr>
-            <a:spLocks noGrp="1" noRot="1" noChangeAspect="1"/>
-          </p:cNvSpPr>
-          <p:nvPr>
-            <p:ph type="sldImg"/>
-          </p:nvPr>
-        </p:nvSpPr>
-        <p:spPr/>
-      </p:sp>
-      <p:sp>
-        <p:nvSpPr>
-          <p:cNvPr id="3" name="Notes Placeholder 2"/>
-          <p:cNvSpPr>
-            <a:spLocks noGrp="1"/>
-          </p:cNvSpPr>
-          <p:nvPr>
-            <p:ph type="body" idx="1"/>
-          </p:nvPr>
-        </p:nvSpPr>
-        <p:spPr/>
-        <p:txBody>
-          <a:bodyPr/>
-          <a:lstStyle/>
-          <a:p>
-            <a:r>
-              <a:rPr lang="en-US" dirty="0"/>
-              <a:t>3. Closing
-note: [마무리] 경청해 주셔서 감사합니다. 투자자 여러분의 질문을 받겠습니다.</a:t>
-            </a:r>
-            <a:endParaRPr lang="en-US" dirty="0"/>
-          </a:p>
-        </p:txBody>
-      </p:sp>
-      <p:sp>
-        <p:nvSpPr>
-          <p:cNvPr id="4" name="Slide Number Placeholder 3"/>
-          <p:cNvSpPr>
-            <a:spLocks noGrp="1"/>
-          </p:cNvSpPr>
-          <p:nvPr>
-            <p:ph type="sldNum" sz="quarter" idx="10"/>
-          </p:nvPr>
-        </p:nvSpPr>
-        <p:spPr/>
-        <p:txBody>
-          <a:bodyPr/>
-          <a:lstStyle/>
-          <a:p>
-            <a:fld id="{F7021451-1387-4CA6-816F-3879F97B5CBC}" type="slidenum">
-              <a:rPr lang="en-US"/>
-              <a:t>3</a:t>
             </a:fld>
             <a:endParaRPr lang="en-US"/>
           </a:p>
@@ -1074,45 +983,6 @@
 <file path=ppt/slides/slide2.xml><?xml version="1.0" encoding="utf-8"?>
 <p:sld xmlns:a="http://schemas.openxmlformats.org/drawingml/2006/main" xmlns:r="http://schemas.openxmlformats.org/officeDocument/2006/relationships" xmlns:p="http://schemas.openxmlformats.org/presentationml/2006/main">
   <p:cSld name="Slide 2">
-    <p:bg>
-      <p:bgPr>
-        <a:blipFill dpi="0" rotWithShape="1">
-          <a:blip r:embed="rId1">
-            <a:lum/>
-          </a:blip>
-          <a:srcRect/>
-          <a:stretch>
-            <a:fillRect/>
-          </a:stretch>
-        </a:blipFill>
-        <a:effectLst/>
-      </p:bgPr>
-    </p:bg>
-    <p:spTree>
-      <p:nvGrpSpPr>
-        <p:cNvPr id="1" name=""/>
-        <p:cNvGrpSpPr/>
-        <p:nvPr/>
-      </p:nvGrpSpPr>
-      <p:grpSpPr>
-        <a:xfrm>
-          <a:off x="0" y="0"/>
-          <a:ext cx="0" cy="0"/>
-          <a:chOff x="0" y="0"/>
-          <a:chExt cx="0" cy="0"/>
-        </a:xfrm>
-      </p:grpSpPr>
-    </p:spTree>
-  </p:cSld>
-  <p:clrMapOvr>
-    <a:masterClrMapping/>
-  </p:clrMapOvr>
-</p:sld>
-</file>
-
-<file path=ppt/slides/slide3.xml><?xml version="1.0" encoding="utf-8"?>
-<p:sld xmlns:a="http://schemas.openxmlformats.org/drawingml/2006/main" xmlns:r="http://schemas.openxmlformats.org/officeDocument/2006/relationships" xmlns:p="http://schemas.openxmlformats.org/presentationml/2006/main">
-  <p:cSld name="Slide 3">
     <p:bg>
       <p:bgPr>
         <a:blipFill dpi="0" rotWithShape="1">

--- a/examples/09_robotics_series_a/Presentation.pptx
+++ b/examples/09_robotics_series_a/Presentation.pptx
@@ -503,8 +503,7 @@
           <a:p>
             <a:r>
               <a:rPr lang="en-US" dirty="0"/>
-              <a:t>Slide 1: Giant Bold Impact Cover
-note: 시리즈 A 피치덱의 강렬한 매출 트랙션과 420% 성장률 지표입니다.</a:t>
+              <a:t>시리즈 A 피치덱의 강렬한 매출 트랙션과 420% 성장률 지표입니다.</a:t>
             </a:r>
             <a:endParaRPr lang="en-US" dirty="0"/>
           </a:p>
@@ -592,7 +591,7 @@
           <a:p>
             <a:r>
               <a:rPr lang="en-US" dirty="0"/>
-              <a:t>Slide 2: Bold Problem vs Solution</a:t>
+              <a:t/>
             </a:r>
             <a:endParaRPr lang="en-US" dirty="0"/>
           </a:p>
@@ -946,16 +945,9 @@
   <p:cSld name="Slide 1">
     <p:bg>
       <p:bgPr>
-        <a:blipFill dpi="0" rotWithShape="1">
-          <a:blip r:embed="rId1">
-            <a:lum/>
-          </a:blip>
-          <a:srcRect/>
-          <a:stretch>
-            <a:fillRect/>
-          </a:stretch>
-        </a:blipFill>
-        <a:effectLst/>
+        <a:solidFill>
+          <a:srgbClr val="080808"/>
+        </a:solidFill>
       </p:bgPr>
     </p:bg>
     <p:spTree>
@@ -972,6 +964,402 @@
           <a:chExt cx="0" cy="0"/>
         </a:xfrm>
       </p:grpSpPr>
+      <p:sp>
+        <p:nvSpPr>
+          <p:cNvPr id="2" name="Shape 0"/>
+          <p:cNvSpPr/>
+          <p:nvPr/>
+        </p:nvSpPr>
+        <p:spPr>
+          <a:xfrm>
+            <a:off x="571500" y="476220"/>
+            <a:ext cx="1773753" cy="386974"/>
+          </a:xfrm>
+          <a:prstGeom prst="rect">
+            <a:avLst/>
+          </a:prstGeom>
+          <a:solidFill>
+            <a:srgbClr val="FF6B00"/>
+          </a:solidFill>
+          <a:ln/>
+        </p:spPr>
+      </p:sp>
+      <p:sp>
+        <p:nvSpPr>
+          <p:cNvPr id="3" name="Text 1"/>
+          <p:cNvSpPr txBox="1"/>
+          <p:nvPr/>
+        </p:nvSpPr>
+        <p:spPr>
+          <a:xfrm>
+            <a:off x="647670" y="511424"/>
+            <a:ext cx="1728948" cy="310805"/>
+          </a:xfrm>
+          <a:prstGeom prst="rect">
+            <a:avLst/>
+          </a:prstGeom>
+          <a:noFill/>
+          <a:ln/>
+        </p:spPr>
+        <p:txBody>
+          <a:bodyPr wrap="none" lIns="0" tIns="0" rIns="0" bIns="0" rtlCol="0" anchor="t"/>
+          <a:lstStyle/>
+          <a:p>
+            <a:pPr algn="l" indent="0" marL="0">
+              <a:lnSpc>
+                <a:spcPts val="2447"/>
+              </a:lnSpc>
+              <a:buNone/>
+            </a:pPr>
+            <a:r>
+              <a:rPr lang="en-US" sz="1631" b="1" spc="-65" kern="0" dirty="0">
+                <a:solidFill>
+                  <a:srgbClr val="000000"/>
+                </a:solidFill>
+                <a:latin typeface="Arial" pitchFamily="34" charset="0"/>
+                <a:ea typeface="Arial" pitchFamily="34" charset="-122"/>
+                <a:cs typeface="Arial" pitchFamily="34" charset="-120"/>
+              </a:rPr>
+              <a:t>SERIES A DECK</a:t>
+            </a:r>
+            <a:endParaRPr lang="en-US" sz="1631" dirty="0"/>
+          </a:p>
+        </p:txBody>
+      </p:sp>
+      <p:sp>
+        <p:nvSpPr>
+          <p:cNvPr id="4" name="Text 2"/>
+          <p:cNvSpPr txBox="1"/>
+          <p:nvPr/>
+        </p:nvSpPr>
+        <p:spPr>
+          <a:xfrm>
+            <a:off x="552480" y="959480"/>
+            <a:ext cx="11087100" cy="1591056"/>
+          </a:xfrm>
+          <a:prstGeom prst="rect">
+            <a:avLst/>
+          </a:prstGeom>
+          <a:noFill/>
+          <a:ln/>
+        </p:spPr>
+        <p:txBody>
+          <a:bodyPr wrap="square" lIns="0" tIns="0" rIns="0" bIns="0" rtlCol="0" anchor="t"/>
+          <a:lstStyle/>
+          <a:p>
+            <a:pPr algn="l" indent="0" marL="0">
+              <a:lnSpc>
+                <a:spcPts val="6264"/>
+              </a:lnSpc>
+              <a:buNone/>
+            </a:pPr>
+            <a:r>
+              <a:rPr lang="en-US" sz="5220" b="1" spc="-65" kern="0" dirty="0">
+                <a:solidFill>
+                  <a:srgbClr val="FFFFFF"/>
+                </a:solidFill>
+                <a:latin typeface="Malgun Gothic" pitchFamily="34" charset="0"/>
+                <a:ea typeface="Malgun Gothic" pitchFamily="34" charset="-122"/>
+                <a:cs typeface="Malgun Gothic" pitchFamily="34" charset="-120"/>
+              </a:rPr>
+              <a:t>완전 무인 물류를 위한</a:t>
+            </a:r>
+            <a:endParaRPr lang="en-US" sz="5220" dirty="0"/>
+          </a:p>
+          <a:p>
+            <a:pPr algn="l" indent="0" marL="0">
+              <a:lnSpc>
+                <a:spcPts val="6264"/>
+              </a:lnSpc>
+              <a:buNone/>
+            </a:pPr>
+            <a:r>
+              <a:rPr lang="en-US" sz="5220" b="1" spc="-65" kern="0" dirty="0">
+                <a:solidFill>
+                  <a:srgbClr val="FF6B00"/>
+                </a:solidFill>
+                <a:latin typeface="Malgun Gothic" pitchFamily="34" charset="0"/>
+                <a:ea typeface="Malgun Gothic" pitchFamily="34" charset="-122"/>
+                <a:cs typeface="Malgun Gothic" pitchFamily="34" charset="-120"/>
+              </a:rPr>
+              <a:t>자율주행 군집 로봇 오케스트레이션</a:t>
+            </a:r>
+            <a:endParaRPr lang="en-US" sz="5220" dirty="0"/>
+          </a:p>
+        </p:txBody>
+      </p:sp>
+      <p:sp>
+        <p:nvSpPr>
+          <p:cNvPr id="5" name="Shape 3"/>
+          <p:cNvSpPr/>
+          <p:nvPr/>
+        </p:nvSpPr>
+        <p:spPr>
+          <a:xfrm>
+            <a:off x="571500" y="5358293"/>
+            <a:ext cx="11048970" cy="19020"/>
+          </a:xfrm>
+          <a:prstGeom prst="rect">
+            <a:avLst/>
+          </a:prstGeom>
+          <a:solidFill>
+            <a:srgbClr val="262626"/>
+          </a:solidFill>
+          <a:ln/>
+        </p:spPr>
+      </p:sp>
+      <p:sp>
+        <p:nvSpPr>
+          <p:cNvPr id="6" name="Text 4"/>
+          <p:cNvSpPr txBox="1"/>
+          <p:nvPr/>
+        </p:nvSpPr>
+        <p:spPr>
+          <a:xfrm>
+            <a:off x="552480" y="3690518"/>
+            <a:ext cx="5820888" cy="194310"/>
+          </a:xfrm>
+          <a:prstGeom prst="rect">
+            <a:avLst/>
+          </a:prstGeom>
+          <a:noFill/>
+          <a:ln/>
+        </p:spPr>
+        <p:txBody>
+          <a:bodyPr wrap="none" lIns="0" tIns="0" rIns="0" bIns="0" rtlCol="0" anchor="t"/>
+          <a:lstStyle/>
+          <a:p>
+            <a:pPr algn="l" indent="0" marL="0">
+              <a:lnSpc>
+                <a:spcPts val="1530"/>
+              </a:lnSpc>
+              <a:buNone/>
+            </a:pPr>
+            <a:r>
+              <a:rPr lang="en-US" sz="1020" b="1" spc="-65" kern="0" dirty="0">
+                <a:solidFill>
+                  <a:srgbClr val="A3A3A3"/>
+                </a:solidFill>
+                <a:latin typeface="Malgun Gothic" pitchFamily="34" charset="0"/>
+                <a:ea typeface="Malgun Gothic" pitchFamily="34" charset="-122"/>
+                <a:cs typeface="Malgun Gothic" pitchFamily="34" charset="-120"/>
+              </a:rPr>
+              <a:t>ANNUAL RECURRING REVENUE (ARR)</a:t>
+            </a:r>
+            <a:endParaRPr lang="en-US" sz="1020" dirty="0"/>
+          </a:p>
+        </p:txBody>
+      </p:sp>
+      <p:sp>
+        <p:nvSpPr>
+          <p:cNvPr id="7" name="Text 5"/>
+          <p:cNvSpPr txBox="1"/>
+          <p:nvPr/>
+        </p:nvSpPr>
+        <p:spPr>
+          <a:xfrm>
+            <a:off x="552480" y="3879525"/>
+            <a:ext cx="5820888" cy="1243035"/>
+          </a:xfrm>
+          <a:prstGeom prst="rect">
+            <a:avLst/>
+          </a:prstGeom>
+          <a:noFill/>
+          <a:ln/>
+        </p:spPr>
+        <p:txBody>
+          <a:bodyPr wrap="none" lIns="0" tIns="0" rIns="0" bIns="0" rtlCol="0" anchor="t"/>
+          <a:lstStyle/>
+          <a:p>
+            <a:pPr algn="l" indent="0" marL="0">
+              <a:lnSpc>
+                <a:spcPts val="9788"/>
+              </a:lnSpc>
+              <a:buNone/>
+            </a:pPr>
+            <a:r>
+              <a:rPr lang="en-US" sz="9788" b="1" spc="-65" kern="0" dirty="0">
+                <a:solidFill>
+                  <a:srgbClr val="FF6B00"/>
+                </a:solidFill>
+                <a:latin typeface="Arial" pitchFamily="34" charset="0"/>
+                <a:ea typeface="Arial" pitchFamily="34" charset="-122"/>
+                <a:cs typeface="Arial" pitchFamily="34" charset="-120"/>
+              </a:rPr>
+              <a:t>$8.4M</a:t>
+            </a:r>
+            <a:endParaRPr lang="en-US" sz="9788" dirty="0"/>
+          </a:p>
+        </p:txBody>
+      </p:sp>
+      <p:sp>
+        <p:nvSpPr>
+          <p:cNvPr id="8" name="Text 6"/>
+          <p:cNvSpPr txBox="1"/>
+          <p:nvPr/>
+        </p:nvSpPr>
+        <p:spPr>
+          <a:xfrm>
+            <a:off x="6229350" y="3690518"/>
+            <a:ext cx="5820888" cy="194310"/>
+          </a:xfrm>
+          <a:prstGeom prst="rect">
+            <a:avLst/>
+          </a:prstGeom>
+          <a:noFill/>
+          <a:ln/>
+        </p:spPr>
+        <p:txBody>
+          <a:bodyPr wrap="none" lIns="0" tIns="0" rIns="0" bIns="0" rtlCol="0" anchor="t"/>
+          <a:lstStyle/>
+          <a:p>
+            <a:pPr algn="l" indent="0" marL="0">
+              <a:lnSpc>
+                <a:spcPts val="1530"/>
+              </a:lnSpc>
+              <a:buNone/>
+            </a:pPr>
+            <a:r>
+              <a:rPr lang="en-US" sz="1020" b="1" spc="-65" kern="0" dirty="0">
+                <a:solidFill>
+                  <a:srgbClr val="A3A3A3"/>
+                </a:solidFill>
+                <a:latin typeface="Malgun Gothic" pitchFamily="34" charset="0"/>
+                <a:ea typeface="Malgun Gothic" pitchFamily="34" charset="-122"/>
+                <a:cs typeface="Malgun Gothic" pitchFamily="34" charset="-120"/>
+              </a:rPr>
+              <a:t>YEAR-OVER-YEAR GROWTH</a:t>
+            </a:r>
+            <a:endParaRPr lang="en-US" sz="1020" dirty="0"/>
+          </a:p>
+        </p:txBody>
+      </p:sp>
+      <p:sp>
+        <p:nvSpPr>
+          <p:cNvPr id="9" name="Text 7"/>
+          <p:cNvSpPr txBox="1"/>
+          <p:nvPr/>
+        </p:nvSpPr>
+        <p:spPr>
+          <a:xfrm>
+            <a:off x="6229350" y="3879525"/>
+            <a:ext cx="5820888" cy="1243035"/>
+          </a:xfrm>
+          <a:prstGeom prst="rect">
+            <a:avLst/>
+          </a:prstGeom>
+          <a:noFill/>
+          <a:ln/>
+        </p:spPr>
+        <p:txBody>
+          <a:bodyPr wrap="none" lIns="0" tIns="0" rIns="0" bIns="0" rtlCol="0" anchor="t"/>
+          <a:lstStyle/>
+          <a:p>
+            <a:pPr algn="l" indent="0" marL="0">
+              <a:lnSpc>
+                <a:spcPts val="9788"/>
+              </a:lnSpc>
+              <a:buNone/>
+            </a:pPr>
+            <a:r>
+              <a:rPr lang="en-US" sz="9788" b="1" spc="-65" kern="0" dirty="0">
+                <a:solidFill>
+                  <a:srgbClr val="FFFFFF"/>
+                </a:solidFill>
+                <a:latin typeface="Arial" pitchFamily="34" charset="0"/>
+                <a:ea typeface="Arial" pitchFamily="34" charset="-122"/>
+                <a:cs typeface="Arial" pitchFamily="34" charset="-120"/>
+              </a:rPr>
+              <a:t>+420%</a:t>
+            </a:r>
+            <a:endParaRPr lang="en-US" sz="9788" dirty="0"/>
+          </a:p>
+        </p:txBody>
+      </p:sp>
+      <p:sp>
+        <p:nvSpPr>
+          <p:cNvPr id="10" name="Text 8"/>
+          <p:cNvSpPr txBox="1"/>
+          <p:nvPr/>
+        </p:nvSpPr>
+        <p:spPr>
+          <a:xfrm>
+            <a:off x="552480" y="6212342"/>
+            <a:ext cx="1756654" cy="182880"/>
+          </a:xfrm>
+          <a:prstGeom prst="rect">
+            <a:avLst/>
+          </a:prstGeom>
+          <a:noFill/>
+          <a:ln/>
+        </p:spPr>
+        <p:txBody>
+          <a:bodyPr wrap="none" lIns="0" tIns="0" rIns="0" bIns="0" rtlCol="0" anchor="t"/>
+          <a:lstStyle/>
+          <a:p>
+            <a:pPr algn="l" indent="0" marL="0">
+              <a:lnSpc>
+                <a:spcPts val="1440"/>
+              </a:lnSpc>
+              <a:buNone/>
+            </a:pPr>
+            <a:r>
+              <a:rPr lang="en-US" sz="960" spc="-65" kern="0" dirty="0">
+                <a:solidFill>
+                  <a:srgbClr val="737373"/>
+                </a:solidFill>
+                <a:latin typeface="Malgun Gothic" pitchFamily="34" charset="0"/>
+                <a:ea typeface="Malgun Gothic" pitchFamily="34" charset="-122"/>
+                <a:cs typeface="Malgun Gothic" pitchFamily="34" charset="-120"/>
+              </a:rPr>
+              <a:t>ROBOTICS-X INC. • CONFIDENTIAL</a:t>
+            </a:r>
+            <a:endParaRPr lang="en-US" sz="960" dirty="0"/>
+          </a:p>
+        </p:txBody>
+      </p:sp>
+      <p:sp>
+        <p:nvSpPr>
+          <p:cNvPr id="11" name="Text 9"/>
+          <p:cNvSpPr txBox="1"/>
+          <p:nvPr/>
+        </p:nvSpPr>
+        <p:spPr>
+          <a:xfrm>
+            <a:off x="10268986" y="6212342"/>
+            <a:ext cx="1458102" cy="182880"/>
+          </a:xfrm>
+          <a:prstGeom prst="rect">
+            <a:avLst/>
+          </a:prstGeom>
+          <a:noFill/>
+          <a:ln/>
+        </p:spPr>
+        <p:txBody>
+          <a:bodyPr wrap="none" lIns="0" tIns="0" rIns="0" bIns="0" rtlCol="0" anchor="t"/>
+          <a:lstStyle/>
+          <a:p>
+            <a:pPr algn="l" indent="0" marL="0">
+              <a:lnSpc>
+                <a:spcPts val="1440"/>
+              </a:lnSpc>
+              <a:buNone/>
+            </a:pPr>
+            <a:r>
+              <a:rPr lang="en-US" sz="960" spc="-65" kern="0" dirty="0">
+                <a:solidFill>
+                  <a:srgbClr val="737373"/>
+                </a:solidFill>
+                <a:latin typeface="Malgun Gothic" pitchFamily="34" charset="0"/>
+                <a:ea typeface="Malgun Gothic" pitchFamily="34" charset="-122"/>
+                <a:cs typeface="Malgun Gothic" pitchFamily="34" charset="-120"/>
+              </a:rPr>
+              <a:t>SERIES A $10M ROUND OPEN</a:t>
+            </a:r>
+            <a:endParaRPr lang="en-US" sz="960" dirty="0"/>
+          </a:p>
+        </p:txBody>
+      </p:sp>
     </p:spTree>
   </p:cSld>
   <p:clrMapOvr>
@@ -985,16 +1373,9 @@
   <p:cSld name="Slide 2">
     <p:bg>
       <p:bgPr>
-        <a:blipFill dpi="0" rotWithShape="1">
-          <a:blip r:embed="rId1">
-            <a:lum/>
-          </a:blip>
-          <a:srcRect/>
-          <a:stretch>
-            <a:fillRect/>
-          </a:stretch>
-        </a:blipFill>
-        <a:effectLst/>
+        <a:solidFill>
+          <a:srgbClr val="080808"/>
+        </a:solidFill>
       </p:bgPr>
     </p:bg>
     <p:spTree>
@@ -1011,6 +1392,454 @@
           <a:chExt cx="0" cy="0"/>
         </a:xfrm>
       </p:grpSpPr>
+      <p:sp>
+        <p:nvSpPr>
+          <p:cNvPr id="2" name="Shape 0"/>
+          <p:cNvSpPr/>
+          <p:nvPr/>
+        </p:nvSpPr>
+        <p:spPr>
+          <a:xfrm>
+            <a:off x="571500" y="476220"/>
+            <a:ext cx="2677546" cy="386974"/>
+          </a:xfrm>
+          <a:prstGeom prst="rect">
+            <a:avLst/>
+          </a:prstGeom>
+          <a:solidFill>
+            <a:srgbClr val="FF6B00"/>
+          </a:solidFill>
+          <a:ln/>
+        </p:spPr>
+      </p:sp>
+      <p:sp>
+        <p:nvSpPr>
+          <p:cNvPr id="3" name="Text 1"/>
+          <p:cNvSpPr txBox="1"/>
+          <p:nvPr/>
+        </p:nvSpPr>
+        <p:spPr>
+          <a:xfrm>
+            <a:off x="647670" y="511424"/>
+            <a:ext cx="2705070" cy="310805"/>
+          </a:xfrm>
+          <a:prstGeom prst="rect">
+            <a:avLst/>
+          </a:prstGeom>
+          <a:noFill/>
+          <a:ln/>
+        </p:spPr>
+        <p:txBody>
+          <a:bodyPr wrap="none" lIns="0" tIns="0" rIns="0" bIns="0" rtlCol="0" anchor="t"/>
+          <a:lstStyle/>
+          <a:p>
+            <a:pPr algn="l" indent="0" marL="0">
+              <a:lnSpc>
+                <a:spcPts val="2447"/>
+              </a:lnSpc>
+              <a:buNone/>
+            </a:pPr>
+            <a:r>
+              <a:rPr lang="en-US" sz="1631" b="1" spc="-65" kern="0" dirty="0">
+                <a:solidFill>
+                  <a:srgbClr val="000000"/>
+                </a:solidFill>
+                <a:latin typeface="Arial" pitchFamily="34" charset="0"/>
+                <a:ea typeface="Arial" pitchFamily="34" charset="-122"/>
+                <a:cs typeface="Arial" pitchFamily="34" charset="-120"/>
+              </a:rPr>
+              <a:t>MARKET OPPORTUNITY</a:t>
+            </a:r>
+            <a:endParaRPr lang="en-US" sz="1631" dirty="0"/>
+          </a:p>
+        </p:txBody>
+      </p:sp>
+      <p:sp>
+        <p:nvSpPr>
+          <p:cNvPr id="4" name="Text 2"/>
+          <p:cNvSpPr txBox="1"/>
+          <p:nvPr/>
+        </p:nvSpPr>
+        <p:spPr>
+          <a:xfrm>
+            <a:off x="552480" y="943021"/>
+            <a:ext cx="11951940" cy="342900"/>
+          </a:xfrm>
+          <a:prstGeom prst="rect">
+            <a:avLst/>
+          </a:prstGeom>
+          <a:noFill/>
+          <a:ln/>
+        </p:spPr>
+        <p:txBody>
+          <a:bodyPr wrap="none" lIns="0" tIns="0" rIns="0" bIns="0" rtlCol="0" anchor="t"/>
+          <a:lstStyle/>
+          <a:p>
+            <a:pPr algn="l" indent="0" marL="0">
+              <a:lnSpc>
+                <a:spcPts val="2700"/>
+              </a:lnSpc>
+              <a:buNone/>
+            </a:pPr>
+            <a:r>
+              <a:rPr lang="en-US" sz="2160" b="1" spc="-65" kern="0" dirty="0">
+                <a:solidFill>
+                  <a:srgbClr val="FFFFFF"/>
+                </a:solidFill>
+                <a:latin typeface="Malgun Gothic" pitchFamily="34" charset="0"/>
+                <a:ea typeface="Malgun Gothic" pitchFamily="34" charset="-122"/>
+                <a:cs typeface="Malgun Gothic" pitchFamily="34" charset="-120"/>
+              </a:rPr>
+              <a:t>전통 물류 풀필먼트의 한계 vs 로보틱스X</a:t>
+            </a:r>
+            <a:endParaRPr lang="en-US" sz="2160" dirty="0"/>
+          </a:p>
+        </p:txBody>
+      </p:sp>
+      <p:sp>
+        <p:nvSpPr>
+          <p:cNvPr id="5" name="Shape 3"/>
+          <p:cNvSpPr/>
+          <p:nvPr/>
+        </p:nvSpPr>
+        <p:spPr>
+          <a:xfrm>
+            <a:off x="571500" y="3116824"/>
+            <a:ext cx="5410230" cy="1444386"/>
+          </a:xfrm>
+          <a:prstGeom prst="roundRect">
+            <a:avLst>
+              <a:gd name="adj" fmla="val 5273"/>
+            </a:avLst>
+          </a:prstGeom>
+          <a:solidFill>
+            <a:srgbClr val="141414"/>
+          </a:solidFill>
+          <a:ln w="9525">
+            <a:solidFill>
+              <a:srgbClr val="262626"/>
+            </a:solidFill>
+            <a:prstDash val="solid"/>
+          </a:ln>
+        </p:spPr>
+      </p:sp>
+      <p:sp>
+        <p:nvSpPr>
+          <p:cNvPr id="6" name="Text 4"/>
+          <p:cNvSpPr txBox="1"/>
+          <p:nvPr/>
+        </p:nvSpPr>
+        <p:spPr>
+          <a:xfrm>
+            <a:off x="790590" y="3348350"/>
+            <a:ext cx="5347686" cy="251460"/>
+          </a:xfrm>
+          <a:prstGeom prst="rect">
+            <a:avLst/>
+          </a:prstGeom>
+          <a:noFill/>
+          <a:ln/>
+        </p:spPr>
+        <p:txBody>
+          <a:bodyPr wrap="none" lIns="0" tIns="0" rIns="0" bIns="0" rtlCol="0" anchor="t"/>
+          <a:lstStyle/>
+          <a:p>
+            <a:pPr algn="l" indent="0" marL="0">
+              <a:lnSpc>
+                <a:spcPts val="1980"/>
+              </a:lnSpc>
+              <a:buNone/>
+            </a:pPr>
+            <a:r>
+              <a:rPr lang="en-US" sz="1320" b="1" spc="-65" kern="0" dirty="0">
+                <a:solidFill>
+                  <a:srgbClr val="EF4444"/>
+                </a:solidFill>
+                <a:latin typeface="Malgun Gothic" pitchFamily="34" charset="0"/>
+                <a:ea typeface="Malgun Gothic" pitchFamily="34" charset="-122"/>
+                <a:cs typeface="Malgun Gothic" pitchFamily="34" charset="-120"/>
+              </a:rPr>
+              <a:t>THE OLD WAY: 수작업 &amp; 단일 AGV</a:t>
+            </a:r>
+            <a:endParaRPr lang="en-US" sz="1320" dirty="0"/>
+          </a:p>
+        </p:txBody>
+      </p:sp>
+      <p:sp>
+        <p:nvSpPr>
+          <p:cNvPr id="7" name="Text 5"/>
+          <p:cNvSpPr txBox="1"/>
+          <p:nvPr/>
+        </p:nvSpPr>
+        <p:spPr>
+          <a:xfrm>
+            <a:off x="790590" y="3674059"/>
+            <a:ext cx="4972050" cy="621792"/>
+          </a:xfrm>
+          <a:prstGeom prst="rect">
+            <a:avLst/>
+          </a:prstGeom>
+          <a:noFill/>
+          <a:ln/>
+        </p:spPr>
+        <p:txBody>
+          <a:bodyPr wrap="square" lIns="0" tIns="0" rIns="0" bIns="0" rtlCol="0" anchor="t"/>
+          <a:lstStyle/>
+          <a:p>
+            <a:pPr algn="l" indent="0" marL="0">
+              <a:lnSpc>
+                <a:spcPts val="1632"/>
+              </a:lnSpc>
+              <a:buNone/>
+            </a:pPr>
+            <a:r>
+              <a:rPr lang="en-US" sz="1020" spc="-65" kern="0" dirty="0">
+                <a:solidFill>
+                  <a:srgbClr val="A3A3A3"/>
+                </a:solidFill>
+                <a:latin typeface="Malgun Gothic" pitchFamily="34" charset="0"/>
+                <a:ea typeface="Malgun Gothic" pitchFamily="34" charset="-122"/>
+                <a:cs typeface="Malgun Gothic" pitchFamily="34" charset="-120"/>
+              </a:rPr>
+              <a:t>• 물류 피크타임 시 300% 병목 및 오배송 급증</a:t>
+            </a:r>
+            <a:endParaRPr lang="en-US" sz="1020" dirty="0"/>
+          </a:p>
+          <a:p>
+            <a:pPr algn="l" indent="0" marL="0">
+              <a:lnSpc>
+                <a:spcPts val="1632"/>
+              </a:lnSpc>
+              <a:buNone/>
+            </a:pPr>
+            <a:r>
+              <a:rPr lang="en-US" sz="1020" spc="-65" kern="0" dirty="0">
+                <a:solidFill>
+                  <a:srgbClr val="A3A3A3"/>
+                </a:solidFill>
+                <a:latin typeface="Malgun Gothic" pitchFamily="34" charset="0"/>
+                <a:ea typeface="Malgun Gothic" pitchFamily="34" charset="-122"/>
+                <a:cs typeface="Malgun Gothic" pitchFamily="34" charset="-120"/>
+              </a:rPr>
+              <a:t>• 단일 로봇 충돌 시 전체 라인 셧다운</a:t>
+            </a:r>
+            <a:endParaRPr lang="en-US" sz="1020" dirty="0"/>
+          </a:p>
+          <a:p>
+            <a:pPr algn="l" indent="0" marL="0">
+              <a:lnSpc>
+                <a:spcPts val="1632"/>
+              </a:lnSpc>
+              <a:buNone/>
+            </a:pPr>
+            <a:r>
+              <a:rPr lang="en-US" sz="1020" spc="-65" kern="0" dirty="0">
+                <a:solidFill>
+                  <a:srgbClr val="A3A3A3"/>
+                </a:solidFill>
+                <a:latin typeface="Malgun Gothic" pitchFamily="34" charset="0"/>
+                <a:ea typeface="Malgun Gothic" pitchFamily="34" charset="-122"/>
+                <a:cs typeface="Malgun Gothic" pitchFamily="34" charset="-120"/>
+              </a:rPr>
+              <a:t>• 설치에만 12개월 이상 소요되는 고비용 인프라</a:t>
+            </a:r>
+            <a:endParaRPr lang="en-US" sz="1020" dirty="0"/>
+          </a:p>
+        </p:txBody>
+      </p:sp>
+      <p:sp>
+        <p:nvSpPr>
+          <p:cNvPr id="8" name="Shape 6"/>
+          <p:cNvSpPr/>
+          <p:nvPr/>
+        </p:nvSpPr>
+        <p:spPr>
+          <a:xfrm>
+            <a:off x="6210330" y="3116824"/>
+            <a:ext cx="5410230" cy="1444386"/>
+          </a:xfrm>
+          <a:prstGeom prst="roundRect">
+            <a:avLst>
+              <a:gd name="adj" fmla="val 5273"/>
+            </a:avLst>
+          </a:prstGeom>
+          <a:solidFill>
+            <a:srgbClr val="1A0D00"/>
+          </a:solidFill>
+          <a:ln w="19050">
+            <a:solidFill>
+              <a:srgbClr val="FF6B00"/>
+            </a:solidFill>
+            <a:prstDash val="solid"/>
+          </a:ln>
+        </p:spPr>
+      </p:sp>
+      <p:sp>
+        <p:nvSpPr>
+          <p:cNvPr id="9" name="Text 7"/>
+          <p:cNvSpPr txBox="1"/>
+          <p:nvPr/>
+        </p:nvSpPr>
+        <p:spPr>
+          <a:xfrm>
+            <a:off x="6438930" y="3357860"/>
+            <a:ext cx="5327112" cy="251460"/>
+          </a:xfrm>
+          <a:prstGeom prst="rect">
+            <a:avLst/>
+          </a:prstGeom>
+          <a:noFill/>
+          <a:ln/>
+        </p:spPr>
+        <p:txBody>
+          <a:bodyPr wrap="none" lIns="0" tIns="0" rIns="0" bIns="0" rtlCol="0" anchor="t"/>
+          <a:lstStyle/>
+          <a:p>
+            <a:pPr algn="l" indent="0" marL="0">
+              <a:lnSpc>
+                <a:spcPts val="1980"/>
+              </a:lnSpc>
+              <a:buNone/>
+            </a:pPr>
+            <a:r>
+              <a:rPr lang="en-US" sz="1320" b="1" spc="-65" kern="0" dirty="0">
+                <a:solidFill>
+                  <a:srgbClr val="FF6B00"/>
+                </a:solidFill>
+                <a:latin typeface="Malgun Gothic" pitchFamily="34" charset="0"/>
+                <a:ea typeface="Malgun Gothic" pitchFamily="34" charset="-122"/>
+                <a:cs typeface="Malgun Gothic" pitchFamily="34" charset="-120"/>
+              </a:rPr>
+              <a:t>THE ROBOTICS-X WAY: 자율 군집</a:t>
+            </a:r>
+            <a:endParaRPr lang="en-US" sz="1320" dirty="0"/>
+          </a:p>
+        </p:txBody>
+      </p:sp>
+      <p:sp>
+        <p:nvSpPr>
+          <p:cNvPr id="10" name="Text 8"/>
+          <p:cNvSpPr txBox="1"/>
+          <p:nvPr/>
+        </p:nvSpPr>
+        <p:spPr>
+          <a:xfrm>
+            <a:off x="6438930" y="3683569"/>
+            <a:ext cx="4953030" cy="621792"/>
+          </a:xfrm>
+          <a:prstGeom prst="rect">
+            <a:avLst/>
+          </a:prstGeom>
+          <a:noFill/>
+          <a:ln/>
+        </p:spPr>
+        <p:txBody>
+          <a:bodyPr wrap="square" lIns="0" tIns="0" rIns="0" bIns="0" rtlCol="0" anchor="t"/>
+          <a:lstStyle/>
+          <a:p>
+            <a:pPr algn="l" indent="0" marL="0">
+              <a:lnSpc>
+                <a:spcPts val="1632"/>
+              </a:lnSpc>
+              <a:buNone/>
+            </a:pPr>
+            <a:r>
+              <a:rPr lang="en-US" sz="1020" spc="-65" kern="0" dirty="0">
+                <a:solidFill>
+                  <a:srgbClr val="FFFFFF"/>
+                </a:solidFill>
+                <a:latin typeface="Malgun Gothic" pitchFamily="34" charset="0"/>
+                <a:ea typeface="Malgun Gothic" pitchFamily="34" charset="-122"/>
+                <a:cs typeface="Malgun Gothic" pitchFamily="34" charset="-120"/>
+              </a:rPr>
+              <a:t>• 1,000대 로봇 실시간 무충돌 자율 경로 생성</a:t>
+            </a:r>
+            <a:endParaRPr lang="en-US" sz="1020" dirty="0"/>
+          </a:p>
+          <a:p>
+            <a:pPr algn="l" indent="0" marL="0">
+              <a:lnSpc>
+                <a:spcPts val="1632"/>
+              </a:lnSpc>
+              <a:buNone/>
+            </a:pPr>
+            <a:r>
+              <a:rPr lang="en-US" sz="1020" spc="-65" kern="0" dirty="0">
+                <a:solidFill>
+                  <a:srgbClr val="FFFFFF"/>
+                </a:solidFill>
+                <a:latin typeface="Malgun Gothic" pitchFamily="34" charset="0"/>
+                <a:ea typeface="Malgun Gothic" pitchFamily="34" charset="-122"/>
+                <a:cs typeface="Malgun Gothic" pitchFamily="34" charset="-120"/>
+              </a:rPr>
+              <a:t>• 2주 만에 기존 창고에 즉시 플러그앤플레이</a:t>
+            </a:r>
+            <a:endParaRPr lang="en-US" sz="1020" dirty="0"/>
+          </a:p>
+          <a:p>
+            <a:pPr algn="l" indent="0" marL="0">
+              <a:lnSpc>
+                <a:spcPts val="1632"/>
+              </a:lnSpc>
+              <a:buNone/>
+            </a:pPr>
+            <a:r>
+              <a:rPr lang="en-US" sz="1020" spc="-65" kern="0" dirty="0">
+                <a:solidFill>
+                  <a:srgbClr val="FFFFFF"/>
+                </a:solidFill>
+                <a:latin typeface="Malgun Gothic" pitchFamily="34" charset="0"/>
+                <a:ea typeface="Malgun Gothic" pitchFamily="34" charset="-122"/>
+                <a:cs typeface="Malgun Gothic" pitchFamily="34" charset="-120"/>
+              </a:rPr>
+              <a:t>• 고객사 물류비 60% 절감으로 8개월 내 ROI 실현</a:t>
+            </a:r>
+            <a:endParaRPr lang="en-US" sz="1020" dirty="0"/>
+          </a:p>
+        </p:txBody>
+      </p:sp>
+      <p:sp>
+        <p:nvSpPr>
+          <p:cNvPr id="11" name="Text 9"/>
+          <p:cNvSpPr txBox="1"/>
+          <p:nvPr/>
+        </p:nvSpPr>
+        <p:spPr>
+          <a:xfrm>
+            <a:off x="-312450" y="6224595"/>
+            <a:ext cx="11951940" cy="171450"/>
+          </a:xfrm>
+          <a:prstGeom prst="rect">
+            <a:avLst/>
+          </a:prstGeom>
+          <a:noFill/>
+          <a:ln/>
+        </p:spPr>
+        <p:txBody>
+          <a:bodyPr wrap="none" lIns="0" tIns="0" rIns="0" bIns="0" rtlCol="0" anchor="t"/>
+          <a:lstStyle/>
+          <a:p>
+            <a:pPr algn="r" indent="0" marL="0">
+              <a:lnSpc>
+                <a:spcPts val="1350"/>
+              </a:lnSpc>
+              <a:buNone/>
+            </a:pPr>
+            <a:r>
+              <a:rPr lang="en-US" sz="900" b="1" spc="-65" kern="0" dirty="0">
+                <a:solidFill>
+                  <a:srgbClr val="FF6B00"/>
+                </a:solidFill>
+                <a:latin typeface="Malgun Gothic" pitchFamily="34" charset="0"/>
+                <a:ea typeface="Malgun Gothic" pitchFamily="34" charset="-122"/>
+                <a:cs typeface="Malgun Gothic" pitchFamily="34" charset="-120"/>
+              </a:rPr>
+              <a:t>PROVEN BY 12 ENTERPRISE FULFILLMENT CENTERS IN KOREA &amp; US</a:t>
+            </a:r>
+            <a:endParaRPr lang="en-US" sz="900" dirty="0"/>
+          </a:p>
+        </p:txBody>
+      </p:sp>
     </p:spTree>
   </p:cSld>
   <p:clrMapOvr>
